--- a/wada-tue-scoping-review/manuscripts/individual_figures/fig2_gap_heatmap.pptx
+++ b/wada-tue-scoping-review/manuscripts/individual_figures/fig2_gap_heatmap.pptx
@@ -3088,39 +3088,9 @@
         <p:nvPr/>
       </p:nvGrpSpPr>
       <p:grpSpPr/>
-      <p:sp>
-        <p:nvSpPr>
-          <p:cNvPr id="2" name="TextBox 1"/>
-          <p:cNvSpPr txBox="1"/>
-          <p:nvPr/>
-        </p:nvSpPr>
-        <p:spPr>
-          <a:xfrm>
-            <a:off x="457200" y="182880"/>
-            <a:ext cx="11247120" cy="548640"/>
-          </a:xfrm>
-          <a:prstGeom prst="rect">
-            <a:avLst/>
-          </a:prstGeom>
-          <a:noFill/>
-        </p:spPr>
-        <p:txBody>
-          <a:bodyPr wrap="square">
-            <a:spAutoFit/>
-          </a:bodyPr>
-          <a:lstStyle/>
-          <a:p>
-            <a:pPr algn="ctr"/>
-            <a:r>
-              <a:rPr b="1" sz="2400"/>
-              <a:t>Figure 2</a:t>
-            </a:r>
-          </a:p>
-        </p:txBody>
-      </p:sp>
       <p:pic>
         <p:nvPicPr>
-          <p:cNvPr id="3" name="Picture 2" descr="fig2_gap_heatmap.png"/>
+          <p:cNvPr id="2" name="Picture 1" descr="fig2_gap_heatmap.png"/>
           <p:cNvPicPr>
             <a:picLocks noChangeAspect="1"/>
           </p:cNvPicPr>
@@ -3134,44 +3104,14 @@
         </p:blipFill>
         <p:spPr>
           <a:xfrm>
-            <a:off x="2144586" y="914400"/>
-            <a:ext cx="7902522" cy="4572000"/>
+            <a:off x="954619" y="457200"/>
+            <a:ext cx="10282456" cy="5943600"/>
           </a:xfrm>
           <a:prstGeom prst="rect">
             <a:avLst/>
           </a:prstGeom>
         </p:spPr>
       </p:pic>
-      <p:sp>
-        <p:nvSpPr>
-          <p:cNvPr id="4" name="TextBox 3"/>
-          <p:cNvSpPr txBox="1"/>
-          <p:nvPr/>
-        </p:nvSpPr>
-        <p:spPr>
-          <a:xfrm>
-            <a:off x="457200" y="5943600"/>
-            <a:ext cx="11247120" cy="731520"/>
-          </a:xfrm>
-          <a:prstGeom prst="rect">
-            <a:avLst/>
-          </a:prstGeom>
-          <a:noFill/>
-        </p:spPr>
-        <p:txBody>
-          <a:bodyPr wrap="square">
-            <a:spAutoFit/>
-          </a:bodyPr>
-          <a:lstStyle/>
-          <a:p>
-            <a:pPr algn="ctr"/>
-            <a:r>
-              <a:rPr sz="1400" i="1"/>
-              <a:t>Figure 2. Clinical-competition gap risk matrix by disease area and assessment dimension.</a:t>
-            </a:r>
-          </a:p>
-        </p:txBody>
-      </p:sp>
     </p:spTree>
   </p:cSld>
   <p:clrMapOvr>

--- a/wada-tue-scoping-review/manuscripts/individual_figures/fig2_gap_heatmap.pptx
+++ b/wada-tue-scoping-review/manuscripts/individual_figures/fig2_gap_heatmap.pptx
@@ -3104,8 +3104,8 @@
         </p:blipFill>
         <p:spPr>
           <a:xfrm>
-            <a:off x="954619" y="457200"/>
-            <a:ext cx="10282456" cy="5943600"/>
+            <a:off x="887177" y="457200"/>
+            <a:ext cx="10417340" cy="5943600"/>
           </a:xfrm>
           <a:prstGeom prst="rect">
             <a:avLst/>
